--- a/docs/SDR-Autopilot-Deck.pptx
+++ b/docs/SDR-Autopilot-Deck.pptx
@@ -4557,7 +4557,7 @@
           <a:ln/>
         </p:spPr>
         <p:txBody>
-          <a:bodyPr wrap="square" lIns="0" tIns="0" rIns="0" bIns="0" rtlCol="0" anchor="ctr"/>
+          <a:bodyPr wrap="square" lIns="0" tIns="0" rIns="0" bIns="0" rtlCol="0" anchor="t"/>
           <a:lstStyle/>
           <a:p>
             <a:pPr marL="342900" indent="-342900">
@@ -4829,7 +4829,7 @@
           <a:ln/>
         </p:spPr>
         <p:txBody>
-          <a:bodyPr wrap="square" lIns="0" tIns="0" rIns="0" bIns="0" rtlCol="0" anchor="ctr"/>
+          <a:bodyPr wrap="square" lIns="0" tIns="0" rIns="0" bIns="0" rtlCol="0" anchor="t"/>
           <a:lstStyle/>
           <a:p>
             <a:pPr marL="342900" indent="-342900">
@@ -5961,9 +5961,9 @@
           <p:nvPr/>
         </p:nvSpPr>
         <p:spPr>
-          <a:xfrm>
-            <a:off x="3840480" y="4233672"/>
-            <a:ext cx="685800" cy="-530352"/>
+          <a:xfrm flipV="1">
+            <a:off x="3840480" y="3703320"/>
+            <a:ext cx="685800" cy="530352"/>
           </a:xfrm>
           <a:prstGeom prst="line">
             <a:avLst/>
@@ -5985,9 +5985,9 @@
           <p:nvPr/>
         </p:nvSpPr>
         <p:spPr>
-          <a:xfrm>
-            <a:off x="7635240" y="3017520"/>
-            <a:ext cx="685800" cy="-1005840"/>
+          <a:xfrm flipV="1">
+            <a:off x="7635240" y="2011680"/>
+            <a:ext cx="685800" cy="1005840"/>
           </a:xfrm>
           <a:prstGeom prst="line">
             <a:avLst/>
@@ -8556,7 +8556,7 @@
           <a:ln/>
         </p:spPr>
         <p:txBody>
-          <a:bodyPr wrap="square" lIns="0" tIns="0" rIns="0" bIns="0" rtlCol="0" anchor="ctr"/>
+          <a:bodyPr wrap="square" lIns="0" tIns="0" rIns="0" bIns="0" rtlCol="0" anchor="t"/>
           <a:lstStyle/>
           <a:p>
             <a:pPr marL="342900" indent="-342900">
@@ -10450,7 +10450,7 @@
           <a:ln/>
         </p:spPr>
         <p:txBody>
-          <a:bodyPr wrap="square" lIns="0" tIns="0" rIns="0" bIns="0" rtlCol="0" anchor="ctr"/>
+          <a:bodyPr wrap="square" lIns="0" tIns="0" rIns="0" bIns="0" rtlCol="0" anchor="t"/>
           <a:lstStyle/>
           <a:p>
             <a:pPr marL="342900" indent="-342900">
@@ -10680,7 +10680,7 @@
           <a:ln/>
         </p:spPr>
         <p:txBody>
-          <a:bodyPr wrap="square" lIns="0" tIns="0" rIns="0" bIns="0" rtlCol="0" anchor="ctr"/>
+          <a:bodyPr wrap="square" lIns="0" tIns="0" rIns="0" bIns="0" rtlCol="0" anchor="t"/>
           <a:lstStyle/>
           <a:p>
             <a:pPr marL="342900" indent="-342900">
@@ -10838,7 +10838,7 @@
           <a:ln/>
         </p:spPr>
         <p:txBody>
-          <a:bodyPr wrap="square" lIns="0" tIns="0" rIns="0" bIns="0" rtlCol="0" anchor="ctr"/>
+          <a:bodyPr wrap="square" lIns="0" tIns="0" rIns="0" bIns="0" rtlCol="0" anchor="t"/>
           <a:lstStyle/>
           <a:p>
             <a:pPr marL="342900" indent="-342900">
